--- a/slides/00-instructions.pptx
+++ b/slides/00-instructions.pptx
@@ -5,10 +5,11 @@
     <p:sldMasterId id="2147483852" r:id="rId1"/>
   </p:sldMasterIdLst>
   <p:notesMasterIdLst>
-    <p:notesMasterId r:id="rId3"/>
+    <p:notesMasterId r:id="rId4"/>
   </p:notesMasterIdLst>
   <p:sldIdLst>
     <p:sldId id="268" r:id="rId2"/>
+    <p:sldId id="269" r:id="rId3"/>
   </p:sldIdLst>
   <p:sldSz cx="12192000" cy="6858000"/>
   <p:notesSz cx="6858000" cy="9144000"/>
@@ -197,7 +198,7 @@
           <a:p>
             <a:fld id="{3CBB8A52-8AC5-C74C-97FB-632C448F3674}" type="datetimeFigureOut">
               <a:rPr lang="en-US" smtClean="0"/>
-              <a:t>10/6/26</a:t>
+              <a:t>10/26/26</a:t>
             </a:fld>
             <a:endParaRPr lang="en-US"/>
           </a:p>
@@ -703,7 +704,7 @@
             <a:fld id="{5586B75A-687E-405C-8A0B-8D00578BA2C3}" type="datetimeFigureOut">
               <a:rPr lang="en-US" smtClean="0"/>
               <a:pPr/>
-              <a:t>10/6/26</a:t>
+              <a:t>10/26/26</a:t>
             </a:fld>
             <a:endParaRPr lang="en-US" dirty="0"/>
           </a:p>
@@ -875,7 +876,7 @@
             <a:fld id="{5586B75A-687E-405C-8A0B-8D00578BA2C3}" type="datetimeFigureOut">
               <a:rPr lang="en-US" smtClean="0"/>
               <a:pPr/>
-              <a:t>10/6/26</a:t>
+              <a:t>10/26/26</a:t>
             </a:fld>
             <a:endParaRPr lang="en-US" dirty="0"/>
           </a:p>
@@ -1057,7 +1058,7 @@
             <a:fld id="{5586B75A-687E-405C-8A0B-8D00578BA2C3}" type="datetimeFigureOut">
               <a:rPr lang="en-US" smtClean="0"/>
               <a:pPr/>
-              <a:t>10/6/26</a:t>
+              <a:t>10/26/26</a:t>
             </a:fld>
             <a:endParaRPr lang="en-US" dirty="0"/>
           </a:p>
@@ -1229,7 +1230,7 @@
             <a:fld id="{5586B75A-687E-405C-8A0B-8D00578BA2C3}" type="datetimeFigureOut">
               <a:rPr lang="en-US" smtClean="0"/>
               <a:pPr/>
-              <a:t>10/6/26</a:t>
+              <a:t>10/26/26</a:t>
             </a:fld>
             <a:endParaRPr lang="en-US" dirty="0"/>
           </a:p>
@@ -1485,7 +1486,7 @@
             <a:fld id="{5586B75A-687E-405C-8A0B-8D00578BA2C3}" type="datetimeFigureOut">
               <a:rPr lang="en-US" smtClean="0"/>
               <a:pPr/>
-              <a:t>10/6/26</a:t>
+              <a:t>10/26/26</a:t>
             </a:fld>
             <a:endParaRPr lang="en-US" dirty="0"/>
           </a:p>
@@ -1775,7 +1776,7 @@
             <a:fld id="{5586B75A-687E-405C-8A0B-8D00578BA2C3}" type="datetimeFigureOut">
               <a:rPr lang="en-US" smtClean="0"/>
               <a:pPr/>
-              <a:t>10/6/26</a:t>
+              <a:t>10/26/26</a:t>
             </a:fld>
             <a:endParaRPr lang="en-US" dirty="0"/>
           </a:p>
@@ -2219,7 +2220,7 @@
             <a:fld id="{5586B75A-687E-405C-8A0B-8D00578BA2C3}" type="datetimeFigureOut">
               <a:rPr lang="en-US" smtClean="0"/>
               <a:pPr/>
-              <a:t>10/6/26</a:t>
+              <a:t>10/26/26</a:t>
             </a:fld>
             <a:endParaRPr lang="en-US" dirty="0"/>
           </a:p>
@@ -2339,7 +2340,7 @@
             <a:fld id="{5586B75A-687E-405C-8A0B-8D00578BA2C3}" type="datetimeFigureOut">
               <a:rPr lang="en-US" smtClean="0"/>
               <a:pPr/>
-              <a:t>10/6/26</a:t>
+              <a:t>10/26/26</a:t>
             </a:fld>
             <a:endParaRPr lang="en-US" dirty="0"/>
           </a:p>
@@ -2436,7 +2437,7 @@
             <a:fld id="{5586B75A-687E-405C-8A0B-8D00578BA2C3}" type="datetimeFigureOut">
               <a:rPr lang="en-US" smtClean="0"/>
               <a:pPr/>
-              <a:t>10/6/26</a:t>
+              <a:t>10/26/26</a:t>
             </a:fld>
             <a:endParaRPr lang="en-US" dirty="0"/>
           </a:p>
@@ -2726,7 +2727,7 @@
             <a:fld id="{5586B75A-687E-405C-8A0B-8D00578BA2C3}" type="datetimeFigureOut">
               <a:rPr lang="en-US" smtClean="0"/>
               <a:pPr/>
-              <a:t>10/6/26</a:t>
+              <a:t>10/26/26</a:t>
             </a:fld>
             <a:endParaRPr lang="en-US" dirty="0"/>
           </a:p>
@@ -3001,7 +3002,7 @@
             <a:fld id="{5586B75A-687E-405C-8A0B-8D00578BA2C3}" type="datetimeFigureOut">
               <a:rPr lang="en-US" smtClean="0"/>
               <a:pPr/>
-              <a:t>10/6/26</a:t>
+              <a:t>10/26/26</a:t>
             </a:fld>
             <a:endParaRPr lang="en-US" dirty="0"/>
           </a:p>
@@ -3314,7 +3315,7 @@
             <a:fld id="{5586B75A-687E-405C-8A0B-8D00578BA2C3}" type="datetimeFigureOut">
               <a:rPr lang="en-US" smtClean="0"/>
               <a:pPr/>
-              <a:t>10/6/26</a:t>
+              <a:t>10/26/26</a:t>
             </a:fld>
             <a:endParaRPr lang="en-US" dirty="0"/>
           </a:p>
@@ -3985,6 +3986,352 @@
     <p:extLst>
       <p:ext uri="{BB962C8B-B14F-4D97-AF65-F5344CB8AC3E}">
         <p14:creationId xmlns:p14="http://schemas.microsoft.com/office/powerpoint/2010/main" val="2288164768"/>
+      </p:ext>
+    </p:extLst>
+  </p:cSld>
+  <p:clrMapOvr>
+    <a:masterClrMapping/>
+  </p:clrMapOvr>
+</p:sld>
+</file>
+
+<file path=ppt/slides/slide2.xml><?xml version="1.0" encoding="utf-8"?>
+<p:sld xmlns:a="http://schemas.openxmlformats.org/drawingml/2006/main" xmlns:r="http://schemas.openxmlformats.org/officeDocument/2006/relationships" xmlns:p="http://schemas.openxmlformats.org/presentationml/2006/main">
+  <p:cSld>
+    <p:spTree>
+      <p:nvGrpSpPr>
+        <p:cNvPr id="1" name="">
+          <a:extLst>
+            <a:ext uri="{FF2B5EF4-FFF2-40B4-BE49-F238E27FC236}">
+              <a16:creationId xmlns:a16="http://schemas.microsoft.com/office/drawing/2014/main" id="{6C44FC30-94C2-550F-D55A-1E69BC04C990}"/>
+            </a:ext>
+          </a:extLst>
+        </p:cNvPr>
+        <p:cNvGrpSpPr/>
+        <p:nvPr/>
+      </p:nvGrpSpPr>
+      <p:grpSpPr>
+        <a:xfrm>
+          <a:off x="0" y="0"/>
+          <a:ext cx="0" cy="0"/>
+          <a:chOff x="0" y="0"/>
+          <a:chExt cx="0" cy="0"/>
+        </a:xfrm>
+      </p:grpSpPr>
+      <p:sp>
+        <p:nvSpPr>
+          <p:cNvPr id="2" name="Title 1">
+            <a:extLst>
+              <a:ext uri="{FF2B5EF4-FFF2-40B4-BE49-F238E27FC236}">
+                <a16:creationId xmlns:a16="http://schemas.microsoft.com/office/drawing/2014/main" id="{381C62ED-7C79-50C4-2EA3-6D963C683197}"/>
+              </a:ext>
+            </a:extLst>
+          </p:cNvPr>
+          <p:cNvSpPr>
+            <a:spLocks noGrp="1"/>
+          </p:cNvSpPr>
+          <p:nvPr>
+            <p:ph type="title"/>
+          </p:nvPr>
+        </p:nvSpPr>
+        <p:spPr/>
+        <p:txBody>
+          <a:bodyPr/>
+          <a:lstStyle/>
+          <a:p>
+            <a:r>
+              <a:rPr lang="en-US" dirty="0"/>
+              <a:t>Plan for Today</a:t>
+            </a:r>
+          </a:p>
+        </p:txBody>
+      </p:sp>
+      <p:sp>
+        <p:nvSpPr>
+          <p:cNvPr id="3" name="Content Placeholder 2">
+            <a:extLst>
+              <a:ext uri="{FF2B5EF4-FFF2-40B4-BE49-F238E27FC236}">
+                <a16:creationId xmlns:a16="http://schemas.microsoft.com/office/drawing/2014/main" id="{7E3B3085-4DEE-74A8-97E7-ACA0EC660D00}"/>
+              </a:ext>
+            </a:extLst>
+          </p:cNvPr>
+          <p:cNvSpPr>
+            <a:spLocks noGrp="1"/>
+          </p:cNvSpPr>
+          <p:nvPr>
+            <p:ph idx="1"/>
+          </p:nvPr>
+        </p:nvSpPr>
+        <p:spPr>
+          <a:xfrm>
+            <a:off x="3560619" y="775855"/>
+            <a:ext cx="8146472" cy="5652653"/>
+          </a:xfrm>
+        </p:spPr>
+        <p:txBody>
+          <a:bodyPr anchor="t">
+            <a:normAutofit/>
+          </a:bodyPr>
+          <a:lstStyle/>
+          <a:p>
+            <a:pPr marL="0" marR="0" lvl="0" indent="0" algn="l" defTabSz="914400" rtl="0" eaLnBrk="1" fontAlgn="auto" latinLnBrk="0" hangingPunct="1">
+              <a:lnSpc>
+                <a:spcPct val="100000"/>
+              </a:lnSpc>
+              <a:spcBef>
+                <a:spcPts val="0"/>
+              </a:spcBef>
+              <a:spcAft>
+                <a:spcPts val="0"/>
+              </a:spcAft>
+              <a:buClr>
+                <a:srgbClr val="93A299"/>
+              </a:buClr>
+              <a:buSzPts val="2040"/>
+              <a:buNone/>
+              <a:tabLst/>
+              <a:defRPr/>
+            </a:pPr>
+            <a:r>
+              <a:rPr lang="en-US" sz="2400" b="1" kern="0" dirty="0">
+                <a:ea typeface="Arial"/>
+                <a:cs typeface="Arial"/>
+                <a:sym typeface="Arial"/>
+              </a:rPr>
+              <a:t>In class work time for a4 – ask questions as they come up! </a:t>
+            </a:r>
+          </a:p>
+          <a:p>
+            <a:pPr marL="0" marR="0" lvl="0" indent="0" algn="l" defTabSz="914400" rtl="0" eaLnBrk="1" fontAlgn="auto" latinLnBrk="0" hangingPunct="1">
+              <a:lnSpc>
+                <a:spcPct val="100000"/>
+              </a:lnSpc>
+              <a:spcBef>
+                <a:spcPts val="0"/>
+              </a:spcBef>
+              <a:spcAft>
+                <a:spcPts val="0"/>
+              </a:spcAft>
+              <a:buClr>
+                <a:srgbClr val="93A299"/>
+              </a:buClr>
+              <a:buSzPts val="2040"/>
+              <a:buNone/>
+              <a:tabLst/>
+              <a:defRPr/>
+            </a:pPr>
+            <a:endParaRPr lang="en-US" sz="2400" kern="0" dirty="0">
+              <a:ea typeface="Arial"/>
+              <a:cs typeface="Arial"/>
+              <a:sym typeface="Arial"/>
+            </a:endParaRPr>
+          </a:p>
+          <a:p>
+            <a:pPr marL="0" marR="0" lvl="0" indent="0" algn="l" defTabSz="914400" rtl="0" eaLnBrk="1" fontAlgn="auto" latinLnBrk="0" hangingPunct="1">
+              <a:lnSpc>
+                <a:spcPct val="100000"/>
+              </a:lnSpc>
+              <a:spcBef>
+                <a:spcPts val="0"/>
+              </a:spcBef>
+              <a:spcAft>
+                <a:spcPts val="0"/>
+              </a:spcAft>
+              <a:buClr>
+                <a:srgbClr val="93A299"/>
+              </a:buClr>
+              <a:buSzPts val="2040"/>
+              <a:buNone/>
+              <a:tabLst/>
+              <a:defRPr/>
+            </a:pPr>
+            <a:r>
+              <a:rPr lang="en-US" sz="2400" kern="0">
+                <a:ea typeface="Arial"/>
+                <a:cs typeface="Arial"/>
+                <a:sym typeface="Arial"/>
+              </a:rPr>
+              <a:t>Reminders:</a:t>
+            </a:r>
+          </a:p>
+          <a:p>
+            <a:pPr marL="0" marR="0" lvl="0" indent="0" algn="l" defTabSz="914400" rtl="0" eaLnBrk="1" fontAlgn="auto" latinLnBrk="0" hangingPunct="1">
+              <a:lnSpc>
+                <a:spcPct val="100000"/>
+              </a:lnSpc>
+              <a:spcBef>
+                <a:spcPts val="0"/>
+              </a:spcBef>
+              <a:spcAft>
+                <a:spcPts val="0"/>
+              </a:spcAft>
+              <a:buClr>
+                <a:srgbClr val="93A299"/>
+              </a:buClr>
+              <a:buSzPts val="2040"/>
+              <a:buNone/>
+              <a:tabLst/>
+              <a:defRPr/>
+            </a:pPr>
+            <a:endParaRPr lang="en-US" sz="2400" kern="0" dirty="0">
+              <a:ea typeface="Arial"/>
+              <a:cs typeface="Arial"/>
+              <a:sym typeface="Arial"/>
+            </a:endParaRPr>
+          </a:p>
+          <a:p>
+            <a:pPr>
+              <a:lnSpc>
+                <a:spcPct val="100000"/>
+              </a:lnSpc>
+              <a:spcBef>
+                <a:spcPts val="0"/>
+              </a:spcBef>
+              <a:buClr>
+                <a:srgbClr val="93A299"/>
+              </a:buClr>
+              <a:buSzPts val="2040"/>
+              <a:defRPr/>
+            </a:pPr>
+            <a:r>
+              <a:rPr lang="en-US" sz="2400" kern="0" dirty="0">
+                <a:ea typeface="Arial"/>
+                <a:cs typeface="Arial"/>
+                <a:sym typeface="Arial"/>
+              </a:rPr>
+              <a:t>Competency based grading – look at the feedback on your reflections </a:t>
+            </a:r>
+          </a:p>
+          <a:p>
+            <a:pPr>
+              <a:lnSpc>
+                <a:spcPct val="100000"/>
+              </a:lnSpc>
+              <a:spcBef>
+                <a:spcPts val="0"/>
+              </a:spcBef>
+              <a:buClr>
+                <a:srgbClr val="93A299"/>
+              </a:buClr>
+              <a:buSzPts val="2040"/>
+              <a:defRPr/>
+            </a:pPr>
+            <a:r>
+              <a:rPr lang="en-US" sz="2400" kern="0" dirty="0">
+                <a:ea typeface="Arial"/>
+                <a:cs typeface="Arial"/>
+                <a:sym typeface="Arial"/>
+              </a:rPr>
+              <a:t>Now is a good time to assess which competencies you have demonstrated and which you have not </a:t>
+            </a:r>
+          </a:p>
+          <a:p>
+            <a:pPr>
+              <a:lnSpc>
+                <a:spcPct val="100000"/>
+              </a:lnSpc>
+              <a:spcBef>
+                <a:spcPts val="0"/>
+              </a:spcBef>
+              <a:buClr>
+                <a:srgbClr val="93A299"/>
+              </a:buClr>
+              <a:buSzPts val="2040"/>
+              <a:defRPr/>
+            </a:pPr>
+            <a:r>
+              <a:rPr lang="en-US" sz="2400" kern="0" dirty="0">
+                <a:ea typeface="Arial"/>
+                <a:cs typeface="Arial"/>
+                <a:sym typeface="Arial"/>
+              </a:rPr>
+              <a:t>You are encouraged to bring you in-progress portfolio to office hours to discuss where you currently are </a:t>
+            </a:r>
+          </a:p>
+          <a:p>
+            <a:pPr marL="457200" marR="0" lvl="0" indent="-457200" algn="l" defTabSz="914400" rtl="0" eaLnBrk="1" fontAlgn="auto" latinLnBrk="0" hangingPunct="1">
+              <a:lnSpc>
+                <a:spcPct val="100000"/>
+              </a:lnSpc>
+              <a:spcBef>
+                <a:spcPts val="0"/>
+              </a:spcBef>
+              <a:spcAft>
+                <a:spcPts val="0"/>
+              </a:spcAft>
+              <a:buClr>
+                <a:srgbClr val="93A299"/>
+              </a:buClr>
+              <a:buSzPts val="2040"/>
+              <a:buFont typeface="+mj-lt"/>
+              <a:buAutoNum type="arabicPeriod"/>
+              <a:tabLst/>
+              <a:defRPr/>
+            </a:pPr>
+            <a:endParaRPr lang="en-US" sz="2400" kern="0" dirty="0">
+              <a:ea typeface="Arial"/>
+              <a:cs typeface="Arial"/>
+              <a:sym typeface="Arial"/>
+            </a:endParaRPr>
+          </a:p>
+          <a:p>
+            <a:pPr marL="457200" marR="0" lvl="0" indent="-457200" algn="l" defTabSz="914400" rtl="0" eaLnBrk="1" fontAlgn="auto" latinLnBrk="0" hangingPunct="1">
+              <a:lnSpc>
+                <a:spcPct val="100000"/>
+              </a:lnSpc>
+              <a:spcBef>
+                <a:spcPts val="0"/>
+              </a:spcBef>
+              <a:spcAft>
+                <a:spcPts val="0"/>
+              </a:spcAft>
+              <a:buClr>
+                <a:srgbClr val="93A299"/>
+              </a:buClr>
+              <a:buSzPts val="2040"/>
+              <a:buFont typeface="+mj-lt"/>
+              <a:buAutoNum type="arabicPeriod"/>
+              <a:tabLst/>
+              <a:defRPr/>
+            </a:pPr>
+            <a:endParaRPr lang="en-US" sz="2400" kern="0" dirty="0">
+              <a:ea typeface="Arial"/>
+              <a:cs typeface="Arial"/>
+              <a:sym typeface="Arial"/>
+            </a:endParaRPr>
+          </a:p>
+          <a:p>
+            <a:pPr marL="457200" marR="0" lvl="0" indent="-457200" algn="l" defTabSz="914400" rtl="0" eaLnBrk="1" fontAlgn="auto" latinLnBrk="0" hangingPunct="1">
+              <a:lnSpc>
+                <a:spcPct val="100000"/>
+              </a:lnSpc>
+              <a:spcBef>
+                <a:spcPts val="0"/>
+              </a:spcBef>
+              <a:spcAft>
+                <a:spcPts val="0"/>
+              </a:spcAft>
+              <a:buClr>
+                <a:srgbClr val="93A299"/>
+              </a:buClr>
+              <a:buSzPts val="2040"/>
+              <a:buFont typeface="+mj-lt"/>
+              <a:buAutoNum type="arabicPeriod"/>
+              <a:tabLst/>
+              <a:defRPr/>
+            </a:pPr>
+            <a:endParaRPr lang="en-US" sz="2200" kern="0" dirty="0">
+              <a:ea typeface="Arial"/>
+              <a:cs typeface="Arial"/>
+              <a:sym typeface="Arial"/>
+            </a:endParaRPr>
+          </a:p>
+        </p:txBody>
+      </p:sp>
+    </p:spTree>
+    <p:extLst>
+      <p:ext uri="{BB962C8B-B14F-4D97-AF65-F5344CB8AC3E}">
+        <p14:creationId xmlns:p14="http://schemas.microsoft.com/office/powerpoint/2010/main" val="3042364224"/>
       </p:ext>
     </p:extLst>
   </p:cSld>
